--- a/docs/presentations/9-11_部会発表_ひといきアプリ開発レポート.pptx
+++ b/docs/presentations/9-11_部会発表_ひといきアプリ開発レポート.pptx
@@ -2992,11 +2992,11 @@
         <p:spPr>
           <a:xfrm>
             <a:off x="6537960" y="4709160"/>
-            <a:ext cx="5029200" cy="1280160"/>
+            <a:ext cx="5029200" cy="1463040"/>
           </a:xfrm>
           <a:prstGeom prst="roundRect">
             <a:avLst>
-              <a:gd name="adj" fmla="val 7143"/>
+              <a:gd name="adj" fmla="val 6250"/>
             </a:avLst>
           </a:prstGeom>
           <a:solidFill>
@@ -3013,7 +3013,7 @@
         </p:nvSpPr>
         <p:spPr>
           <a:xfrm>
-            <a:off x="6812280" y="4864608"/>
+            <a:off x="6812280" y="4846320"/>
             <a:ext cx="4572000" cy="365760"/>
           </a:xfrm>
           <a:prstGeom prst="rect">
@@ -3052,8 +3052,8 @@
         </p:nvSpPr>
         <p:spPr>
           <a:xfrm>
-            <a:off x="6812280" y="5230368"/>
-            <a:ext cx="4572000" cy="640080"/>
+            <a:off x="6812280" y="5193792"/>
+            <a:ext cx="4572000" cy="320040"/>
           </a:xfrm>
           <a:prstGeom prst="rect">
             <a:avLst/>
@@ -3086,6 +3086,45 @@
       <p:sp>
         <p:nvSpPr>
           <p:cNvPr id="35" name="Text 26"/>
+          <p:cNvSpPr txBox="1"/>
+          <p:nvPr/>
+        </p:nvSpPr>
+        <p:spPr>
+          <a:xfrm>
+            <a:off x="6812280" y="5486400"/>
+            <a:ext cx="4572000" cy="548640"/>
+          </a:xfrm>
+          <a:prstGeom prst="rect">
+            <a:avLst/>
+          </a:prstGeom>
+          <a:noFill/>
+          <a:ln/>
+        </p:spPr>
+        <p:txBody>
+          <a:bodyPr wrap="square" lIns="0" tIns="0" rIns="0" bIns="0" rtlCol="0" anchor="ctr"/>
+          <a:lstStyle/>
+          <a:p>
+            <a:pPr indent="0" marL="0">
+              <a:buNone/>
+            </a:pPr>
+            <a:r>
+              <a:rPr lang="en-US" sz="1200" dirty="0">
+                <a:solidFill>
+                  <a:srgbClr val="CADCFC"/>
+                </a:solidFill>
+                <a:latin typeface="Calibri" pitchFamily="34" charset="0"/>
+                <a:ea typeface="Calibri" pitchFamily="34" charset="-122"/>
+                <a:cs typeface="Calibri" pitchFamily="34" charset="-120"/>
+              </a:rPr>
+              <a:t>開発規模：約10,000行（TypeScript／86ファイル、src配下）</a:t>
+            </a:r>
+            <a:endParaRPr lang="en-US" sz="1200" dirty="0"/>
+          </a:p>
+        </p:txBody>
+      </p:sp>
+      <p:sp>
+        <p:nvSpPr>
+          <p:cNvPr id="36" name="Text 27"/>
           <p:cNvSpPr txBox="1"/>
           <p:nvPr/>
         </p:nvSpPr>
@@ -3124,7 +3163,7 @@
       </p:sp>
       <p:sp>
         <p:nvSpPr>
-          <p:cNvPr id="36" name="Text 27"/>
+          <p:cNvPr id="37" name="Text 28"/>
           <p:cNvSpPr txBox="1"/>
           <p:nvPr/>
         </p:nvSpPr>
@@ -5386,8 +5425,8 @@
         </p:nvSpPr>
         <p:spPr>
           <a:xfrm>
-            <a:off x="7223760" y="2834640"/>
-            <a:ext cx="960120" cy="411480"/>
+            <a:off x="8778240" y="2834640"/>
+            <a:ext cx="0" cy="201168"/>
           </a:xfrm>
           <a:prstGeom prst="line">
             <a:avLst/>
@@ -5409,8 +5448,8 @@
         </p:nvSpPr>
         <p:spPr>
           <a:xfrm>
-            <a:off x="9372600" y="2834640"/>
-            <a:ext cx="960120" cy="411480"/>
+            <a:off x="7223760" y="3035808"/>
+            <a:ext cx="3108960" cy="0"/>
           </a:xfrm>
           <a:prstGeom prst="line">
             <a:avLst/>
@@ -5432,8 +5471,80 @@
         </p:nvSpPr>
         <p:spPr>
           <a:xfrm>
+            <a:off x="7223760" y="3035808"/>
+            <a:ext cx="0" cy="210312"/>
+          </a:xfrm>
+          <a:prstGeom prst="line">
+            <a:avLst/>
+          </a:prstGeom>
+          <a:noFill/>
+          <a:ln w="19050">
+            <a:solidFill>
+              <a:srgbClr val="8B97C4"/>
+            </a:solidFill>
+            <a:prstDash val="solid"/>
+            <a:tailEnd type="triangle"/>
+          </a:ln>
+        </p:spPr>
+      </p:sp>
+      <p:sp>
+        <p:nvSpPr>
+          <p:cNvPr id="44" name="Shape 42"/>
+          <p:cNvSpPr/>
+          <p:nvPr/>
+        </p:nvSpPr>
+        <p:spPr>
+          <a:xfrm>
+            <a:off x="10332720" y="3035808"/>
+            <a:ext cx="0" cy="210312"/>
+          </a:xfrm>
+          <a:prstGeom prst="line">
+            <a:avLst/>
+          </a:prstGeom>
+          <a:noFill/>
+          <a:ln w="19050">
+            <a:solidFill>
+              <a:srgbClr val="8B97C4"/>
+            </a:solidFill>
+            <a:prstDash val="solid"/>
+            <a:tailEnd type="triangle"/>
+          </a:ln>
+        </p:spPr>
+      </p:sp>
+      <p:sp>
+        <p:nvSpPr>
+          <p:cNvPr id="45" name="Shape 43"/>
+          <p:cNvSpPr/>
+          <p:nvPr/>
+        </p:nvSpPr>
+        <p:spPr>
+          <a:xfrm>
             <a:off x="7223760" y="3749040"/>
             <a:ext cx="0" cy="365760"/>
+          </a:xfrm>
+          <a:prstGeom prst="line">
+            <a:avLst/>
+          </a:prstGeom>
+          <a:noFill/>
+          <a:ln w="19050">
+            <a:solidFill>
+              <a:srgbClr val="8B97C4"/>
+            </a:solidFill>
+            <a:prstDash val="solid"/>
+            <a:tailEnd type="triangle"/>
+          </a:ln>
+        </p:spPr>
+      </p:sp>
+      <p:sp>
+        <p:nvSpPr>
+          <p:cNvPr id="46" name="Shape 44"/>
+          <p:cNvSpPr/>
+          <p:nvPr/>
+        </p:nvSpPr>
+        <p:spPr>
+          <a:xfrm>
+            <a:off x="8138160" y="4366260"/>
+            <a:ext cx="0" cy="-434340"/>
           </a:xfrm>
           <a:prstGeom prst="line">
             <a:avLst/>
@@ -5449,14 +5560,14 @@
       </p:sp>
       <p:sp>
         <p:nvSpPr>
-          <p:cNvPr id="44" name="Shape 42"/>
+          <p:cNvPr id="47" name="Shape 45"/>
           <p:cNvSpPr/>
           <p:nvPr/>
         </p:nvSpPr>
         <p:spPr>
           <a:xfrm>
-            <a:off x="8138160" y="3497580"/>
-            <a:ext cx="1280160" cy="868680"/>
+            <a:off x="8138160" y="3931920"/>
+            <a:ext cx="2194560" cy="0"/>
           </a:xfrm>
           <a:prstGeom prst="line">
             <a:avLst/>
@@ -5472,14 +5583,14 @@
       </p:sp>
       <p:sp>
         <p:nvSpPr>
-          <p:cNvPr id="45" name="Shape 43"/>
+          <p:cNvPr id="48" name="Shape 46"/>
           <p:cNvSpPr/>
           <p:nvPr/>
         </p:nvSpPr>
         <p:spPr>
           <a:xfrm>
-            <a:off x="10332720" y="3749040"/>
-            <a:ext cx="0" cy="365760"/>
+            <a:off x="10332720" y="3931920"/>
+            <a:ext cx="0" cy="-182880"/>
           </a:xfrm>
           <a:prstGeom prst="line">
             <a:avLst/>
@@ -5490,19 +5601,20 @@
               <a:srgbClr val="8B97C4"/>
             </a:solidFill>
             <a:prstDash val="solid"/>
+            <a:tailEnd type="triangle"/>
           </a:ln>
         </p:spPr>
       </p:sp>
       <p:sp>
         <p:nvSpPr>
-          <p:cNvPr id="46" name="Shape 44"/>
+          <p:cNvPr id="49" name="Shape 47"/>
           <p:cNvSpPr/>
           <p:nvPr/>
         </p:nvSpPr>
         <p:spPr>
           <a:xfrm>
-            <a:off x="10332720" y="4617720"/>
-            <a:ext cx="0" cy="274320"/>
+            <a:off x="10332720" y="3749040"/>
+            <a:ext cx="0" cy="365760"/>
           </a:xfrm>
           <a:prstGeom prst="line">
             <a:avLst/>
@@ -5513,12 +5625,37 @@
               <a:srgbClr val="8B97C4"/>
             </a:solidFill>
             <a:prstDash val="solid"/>
+            <a:tailEnd type="triangle"/>
           </a:ln>
         </p:spPr>
       </p:sp>
       <p:sp>
         <p:nvSpPr>
-          <p:cNvPr id="47" name="Shape 45"/>
+          <p:cNvPr id="50" name="Shape 48"/>
+          <p:cNvSpPr/>
+          <p:nvPr/>
+        </p:nvSpPr>
+        <p:spPr>
+          <a:xfrm>
+            <a:off x="10332720" y="4617720"/>
+            <a:ext cx="0" cy="274320"/>
+          </a:xfrm>
+          <a:prstGeom prst="line">
+            <a:avLst/>
+          </a:prstGeom>
+          <a:noFill/>
+          <a:ln w="19050">
+            <a:solidFill>
+              <a:srgbClr val="8B97C4"/>
+            </a:solidFill>
+            <a:prstDash val="solid"/>
+            <a:tailEnd type="triangle"/>
+          </a:ln>
+        </p:spPr>
+      </p:sp>
+      <p:sp>
+        <p:nvSpPr>
+          <p:cNvPr id="51" name="Shape 49"/>
           <p:cNvSpPr/>
           <p:nvPr/>
         </p:nvSpPr>
@@ -5541,7 +5678,7 @@
       </p:sp>
       <p:sp>
         <p:nvSpPr>
-          <p:cNvPr id="48" name="Shape 46"/>
+          <p:cNvPr id="52" name="Shape 50"/>
           <p:cNvSpPr/>
           <p:nvPr/>
         </p:nvSpPr>
@@ -5564,7 +5701,7 @@
       </p:sp>
       <p:sp>
         <p:nvSpPr>
-          <p:cNvPr id="49" name="Shape 47"/>
+          <p:cNvPr id="53" name="Shape 51"/>
           <p:cNvSpPr/>
           <p:nvPr/>
         </p:nvSpPr>
@@ -5588,7 +5725,7 @@
       </p:sp>
       <p:sp>
         <p:nvSpPr>
-          <p:cNvPr id="50" name="Text 48"/>
+          <p:cNvPr id="54" name="Text 52"/>
           <p:cNvSpPr txBox="1"/>
           <p:nvPr/>
         </p:nvSpPr>
@@ -5627,7 +5764,7 @@
       </p:sp>
       <p:sp>
         <p:nvSpPr>
-          <p:cNvPr id="51" name="Text 49"/>
+          <p:cNvPr id="55" name="Text 53"/>
           <p:cNvSpPr txBox="1"/>
           <p:nvPr/>
         </p:nvSpPr>
@@ -5666,7 +5803,7 @@
       </p:sp>
       <p:sp>
         <p:nvSpPr>
-          <p:cNvPr id="52" name="Text 50"/>
+          <p:cNvPr id="56" name="Text 54"/>
           <p:cNvSpPr txBox="1"/>
           <p:nvPr/>
         </p:nvSpPr>

--- a/docs/presentations/9-11_部会発表_ひといきアプリ開発レポート.pptx
+++ b/docs/presentations/9-11_部会発表_ひといきアプリ開発レポート.pptx
@@ -5544,7 +5544,7 @@
         <p:spPr>
           <a:xfrm>
             <a:off x="8138160" y="4366260"/>
-            <a:ext cx="0" cy="-434340"/>
+            <a:ext cx="0" cy="-868680"/>
           </a:xfrm>
           <a:prstGeom prst="line">
             <a:avLst/>
@@ -5566,31 +5566,8 @@
         </p:nvSpPr>
         <p:spPr>
           <a:xfrm>
-            <a:off x="8138160" y="3931920"/>
-            <a:ext cx="2194560" cy="0"/>
-          </a:xfrm>
-          <a:prstGeom prst="line">
-            <a:avLst/>
-          </a:prstGeom>
-          <a:noFill/>
-          <a:ln w="19050">
-            <a:solidFill>
-              <a:srgbClr val="8B97C4"/>
-            </a:solidFill>
-            <a:prstDash val="solid"/>
-          </a:ln>
-        </p:spPr>
-      </p:sp>
-      <p:sp>
-        <p:nvSpPr>
-          <p:cNvPr id="48" name="Shape 46"/>
-          <p:cNvSpPr/>
-          <p:nvPr/>
-        </p:nvSpPr>
-        <p:spPr>
-          <a:xfrm>
-            <a:off x="10332720" y="3931920"/>
-            <a:ext cx="0" cy="-182880"/>
+            <a:off x="8138160" y="3497580"/>
+            <a:ext cx="1280160" cy="0"/>
           </a:xfrm>
           <a:prstGeom prst="line">
             <a:avLst/>
@@ -5607,7 +5584,7 @@
       </p:sp>
       <p:sp>
         <p:nvSpPr>
-          <p:cNvPr id="49" name="Shape 47"/>
+          <p:cNvPr id="48" name="Shape 46"/>
           <p:cNvSpPr/>
           <p:nvPr/>
         </p:nvSpPr>
@@ -5631,7 +5608,7 @@
       </p:sp>
       <p:sp>
         <p:nvSpPr>
-          <p:cNvPr id="50" name="Shape 48"/>
+          <p:cNvPr id="49" name="Shape 47"/>
           <p:cNvSpPr/>
           <p:nvPr/>
         </p:nvSpPr>
@@ -5655,7 +5632,7 @@
       </p:sp>
       <p:sp>
         <p:nvSpPr>
-          <p:cNvPr id="51" name="Shape 49"/>
+          <p:cNvPr id="50" name="Shape 48"/>
           <p:cNvSpPr/>
           <p:nvPr/>
         </p:nvSpPr>
@@ -5678,7 +5655,7 @@
       </p:sp>
       <p:sp>
         <p:nvSpPr>
-          <p:cNvPr id="52" name="Shape 50"/>
+          <p:cNvPr id="51" name="Shape 49"/>
           <p:cNvSpPr/>
           <p:nvPr/>
         </p:nvSpPr>
@@ -5701,7 +5678,7 @@
       </p:sp>
       <p:sp>
         <p:nvSpPr>
-          <p:cNvPr id="53" name="Shape 51"/>
+          <p:cNvPr id="52" name="Shape 50"/>
           <p:cNvSpPr/>
           <p:nvPr/>
         </p:nvSpPr>
@@ -5725,7 +5702,7 @@
       </p:sp>
       <p:sp>
         <p:nvSpPr>
-          <p:cNvPr id="54" name="Text 52"/>
+          <p:cNvPr id="53" name="Text 51"/>
           <p:cNvSpPr txBox="1"/>
           <p:nvPr/>
         </p:nvSpPr>
@@ -5764,7 +5741,7 @@
       </p:sp>
       <p:sp>
         <p:nvSpPr>
-          <p:cNvPr id="55" name="Text 53"/>
+          <p:cNvPr id="54" name="Text 52"/>
           <p:cNvSpPr txBox="1"/>
           <p:nvPr/>
         </p:nvSpPr>
@@ -5803,7 +5780,7 @@
       </p:sp>
       <p:sp>
         <p:nvSpPr>
-          <p:cNvPr id="56" name="Text 54"/>
+          <p:cNvPr id="55" name="Text 53"/>
           <p:cNvSpPr txBox="1"/>
           <p:nvPr/>
         </p:nvSpPr>

--- a/docs/presentations/9-11_部会発表_ひといきアプリ開発レポート.pptx
+++ b/docs/presentations/9-11_部会発表_ひといきアプリ開発レポート.pptx
@@ -5543,8 +5543,8 @@
         </p:nvSpPr>
         <p:spPr>
           <a:xfrm>
-            <a:off x="8138160" y="4366260"/>
-            <a:ext cx="0" cy="-868680"/>
+            <a:off x="7498080" y="4114800"/>
+            <a:ext cx="0" cy="-182880"/>
           </a:xfrm>
           <a:prstGeom prst="line">
             <a:avLst/>
@@ -5566,8 +5566,31 @@
         </p:nvSpPr>
         <p:spPr>
           <a:xfrm>
-            <a:off x="8138160" y="3497580"/>
-            <a:ext cx="1280160" cy="0"/>
+            <a:off x="7498080" y="3931920"/>
+            <a:ext cx="2322576" cy="0"/>
+          </a:xfrm>
+          <a:prstGeom prst="line">
+            <a:avLst/>
+          </a:prstGeom>
+          <a:noFill/>
+          <a:ln w="19050">
+            <a:solidFill>
+              <a:srgbClr val="8B97C4"/>
+            </a:solidFill>
+            <a:prstDash val="solid"/>
+          </a:ln>
+        </p:spPr>
+      </p:sp>
+      <p:sp>
+        <p:nvSpPr>
+          <p:cNvPr id="48" name="Shape 46"/>
+          <p:cNvSpPr/>
+          <p:nvPr/>
+        </p:nvSpPr>
+        <p:spPr>
+          <a:xfrm>
+            <a:off x="9820656" y="3931920"/>
+            <a:ext cx="0" cy="-182880"/>
           </a:xfrm>
           <a:prstGeom prst="line">
             <a:avLst/>
@@ -5584,7 +5607,7 @@
       </p:sp>
       <p:sp>
         <p:nvSpPr>
-          <p:cNvPr id="48" name="Shape 46"/>
+          <p:cNvPr id="49" name="Shape 47"/>
           <p:cNvSpPr/>
           <p:nvPr/>
         </p:nvSpPr>
@@ -5608,7 +5631,7 @@
       </p:sp>
       <p:sp>
         <p:nvSpPr>
-          <p:cNvPr id="49" name="Shape 47"/>
+          <p:cNvPr id="50" name="Shape 48"/>
           <p:cNvSpPr/>
           <p:nvPr/>
         </p:nvSpPr>
@@ -5632,7 +5655,7 @@
       </p:sp>
       <p:sp>
         <p:nvSpPr>
-          <p:cNvPr id="50" name="Shape 48"/>
+          <p:cNvPr id="51" name="Shape 49"/>
           <p:cNvSpPr/>
           <p:nvPr/>
         </p:nvSpPr>
@@ -5655,7 +5678,7 @@
       </p:sp>
       <p:sp>
         <p:nvSpPr>
-          <p:cNvPr id="51" name="Shape 49"/>
+          <p:cNvPr id="52" name="Shape 50"/>
           <p:cNvSpPr/>
           <p:nvPr/>
         </p:nvSpPr>
@@ -5678,7 +5701,7 @@
       </p:sp>
       <p:sp>
         <p:nvSpPr>
-          <p:cNvPr id="52" name="Shape 50"/>
+          <p:cNvPr id="53" name="Shape 51"/>
           <p:cNvSpPr/>
           <p:nvPr/>
         </p:nvSpPr>
@@ -5702,7 +5725,7 @@
       </p:sp>
       <p:sp>
         <p:nvSpPr>
-          <p:cNvPr id="53" name="Text 51"/>
+          <p:cNvPr id="54" name="Text 52"/>
           <p:cNvSpPr txBox="1"/>
           <p:nvPr/>
         </p:nvSpPr>
@@ -5741,7 +5764,7 @@
       </p:sp>
       <p:sp>
         <p:nvSpPr>
-          <p:cNvPr id="54" name="Text 52"/>
+          <p:cNvPr id="55" name="Text 53"/>
           <p:cNvSpPr txBox="1"/>
           <p:nvPr/>
         </p:nvSpPr>
@@ -5780,7 +5803,7 @@
       </p:sp>
       <p:sp>
         <p:nvSpPr>
-          <p:cNvPr id="55" name="Text 53"/>
+          <p:cNvPr id="56" name="Text 54"/>
           <p:cNvSpPr txBox="1"/>
           <p:nvPr/>
         </p:nvSpPr>

--- a/docs/presentations/9-11_部会発表_ひといきアプリ開発レポート.pptx
+++ b/docs/presentations/9-11_部会発表_ひといきアプリ開発レポート.pptx
@@ -5542,9 +5542,9 @@
           <p:nvPr/>
         </p:nvSpPr>
         <p:spPr>
-          <a:xfrm>
-            <a:off x="7498080" y="4114800"/>
-            <a:ext cx="0" cy="-182880"/>
+          <a:xfrm flipV="1">
+            <a:off x="7498080" y="3931920"/>
+            <a:ext cx="0" cy="182880"/>
           </a:xfrm>
           <a:prstGeom prst="line">
             <a:avLst/>
@@ -5588,9 +5588,9 @@
           <p:nvPr/>
         </p:nvSpPr>
         <p:spPr>
-          <a:xfrm>
-            <a:off x="9820656" y="3931920"/>
-            <a:ext cx="0" cy="-182880"/>
+          <a:xfrm flipV="1">
+            <a:off x="9820656" y="3749040"/>
+            <a:ext cx="0" cy="182880"/>
           </a:xfrm>
           <a:prstGeom prst="line">
             <a:avLst/>
@@ -5683,7 +5683,7 @@
           <p:nvPr/>
         </p:nvSpPr>
         <p:spPr>
-          <a:xfrm>
+          <a:xfrm flipV="1">
             <a:off x="11365992" y="2560320"/>
             <a:ext cx="0" cy="2583180"/>
           </a:xfrm>
@@ -5706,7 +5706,7 @@
           <p:nvPr/>
         </p:nvSpPr>
         <p:spPr>
-          <a:xfrm>
+          <a:xfrm flipH="1">
             <a:off x="9966960" y="2560320"/>
             <a:ext cx="1399032" cy="0"/>
           </a:xfrm>

--- a/docs/presentations/9-11_部会発表_ひといきアプリ開発レポート.pptx
+++ b/docs/presentations/9-11_部会発表_ひといきアプリ開発レポート.pptx
@@ -14,9 +14,10 @@
     <p:sldId id="262" r:id="rId8"/>
     <p:sldId id="263" r:id="rId9"/>
     <p:sldId id="264" r:id="rId10"/>
+    <p:sldId id="265" r:id="rId11"/>
   </p:sldIdLst>
   <p:notesMasterIdLst>
-    <p:notesMasterId r:id="rId11"/>
+    <p:notesMasterId r:id="rId12"/>
   </p:notesMasterIdLst>
   <p:sldSz cx="12191695" cy="6858000"/>
   <p:notesSz cx="6858000" cy="12191695"/>
@@ -534,6 +535,94 @@
             <a:fld id="{F7021451-1387-4CA6-816F-3879F97B5CBC}" type="slidenum">
               <a:rPr lang="en-US"/>
               <a:t>1</a:t>
+            </a:fld>
+            <a:endParaRPr lang="en-US"/>
+          </a:p>
+        </p:txBody>
+      </p:sp>
+    </p:spTree>
+    <p:extLst>
+      <p:ext uri="{BB962C8B-B14F-4D97-AF65-F5344CB8AC3E}">
+        <p14:creationId xmlns:p14="http://schemas.microsoft.com/office/powerpoint/2010/main" val="1024086991"/>
+      </p:ext>
+    </p:extLst>
+  </p:cSld>
+  <p:clrMapOvr>
+    <a:masterClrMapping/>
+  </p:clrMapOvr>
+</p:notes>
+</file>
+
+<file path=ppt/notesSlides/notesSlide10.xml><?xml version="1.0" encoding="utf-8"?>
+<p:notes xmlns:a="http://schemas.openxmlformats.org/drawingml/2006/main" xmlns:r="http://schemas.openxmlformats.org/officeDocument/2006/relationships" xmlns:p="http://schemas.openxmlformats.org/presentationml/2006/main">
+  <p:cSld>
+    <p:spTree>
+      <p:nvGrpSpPr>
+        <p:cNvPr id="1" name=""/>
+        <p:cNvGrpSpPr/>
+        <p:nvPr/>
+      </p:nvGrpSpPr>
+      <p:grpSpPr>
+        <a:xfrm>
+          <a:off x="0" y="0"/>
+          <a:ext cx="0" cy="0"/>
+          <a:chOff x="0" y="0"/>
+          <a:chExt cx="0" cy="0"/>
+        </a:xfrm>
+      </p:grpSpPr>
+      <p:sp>
+        <p:nvSpPr>
+          <p:cNvPr id="2" name="Slide Image Placeholder 1"/>
+          <p:cNvSpPr>
+            <a:spLocks noGrp="1" noRot="1" noChangeAspect="1"/>
+          </p:cNvSpPr>
+          <p:nvPr>
+            <p:ph type="sldImg"/>
+          </p:nvPr>
+        </p:nvSpPr>
+        <p:spPr/>
+      </p:sp>
+      <p:sp>
+        <p:nvSpPr>
+          <p:cNvPr id="3" name="Notes Placeholder 2"/>
+          <p:cNvSpPr>
+            <a:spLocks noGrp="1"/>
+          </p:cNvSpPr>
+          <p:nvPr>
+            <p:ph type="body" idx="1"/>
+          </p:nvPr>
+        </p:nvSpPr>
+        <p:spPr/>
+        <p:txBody>
+          <a:bodyPr/>
+          <a:lstStyle/>
+          <a:p>
+            <a:r>
+              <a:rPr lang="en-US" dirty="0"/>
+              <a:t/>
+            </a:r>
+            <a:endParaRPr lang="en-US" dirty="0"/>
+          </a:p>
+        </p:txBody>
+      </p:sp>
+      <p:sp>
+        <p:nvSpPr>
+          <p:cNvPr id="4" name="Slide Number Placeholder 3"/>
+          <p:cNvSpPr>
+            <a:spLocks noGrp="1"/>
+          </p:cNvSpPr>
+          <p:nvPr>
+            <p:ph type="sldNum" sz="quarter" idx="10"/>
+          </p:nvPr>
+        </p:nvSpPr>
+        <p:spPr/>
+        <p:txBody>
+          <a:bodyPr/>
+          <a:lstStyle/>
+          <a:p>
+            <a:fld id="{F7021451-1387-4CA6-816F-3879F97B5CBC}" type="slidenum">
+              <a:rPr lang="en-US"/>
+              <a:t>10</a:t>
             </a:fld>
             <a:endParaRPr lang="en-US"/>
           </a:p>
@@ -1911,6 +2000,200 @@
 </p:sld>
 </file>
 
+<file path=ppt/slides/slide10.xml><?xml version="1.0" encoding="utf-8"?>
+<p:sld xmlns:a="http://schemas.openxmlformats.org/drawingml/2006/main" xmlns:r="http://schemas.openxmlformats.org/officeDocument/2006/relationships" xmlns:p="http://schemas.openxmlformats.org/presentationml/2006/main">
+  <p:cSld name="Slide 10">
+    <p:bg>
+      <p:bgPr>
+        <a:solidFill>
+          <a:srgbClr val="1E2761"/>
+        </a:solidFill>
+      </p:bgPr>
+    </p:bg>
+    <p:spTree>
+      <p:nvGrpSpPr>
+        <p:cNvPr id="1" name=""/>
+        <p:cNvGrpSpPr/>
+        <p:nvPr/>
+      </p:nvGrpSpPr>
+      <p:grpSpPr>
+        <a:xfrm>
+          <a:off x="0" y="0"/>
+          <a:ext cx="0" cy="0"/>
+          <a:chOff x="0" y="0"/>
+          <a:chExt cx="0" cy="0"/>
+        </a:xfrm>
+      </p:grpSpPr>
+      <p:sp>
+        <p:nvSpPr>
+          <p:cNvPr id="2" name="Shape 0"/>
+          <p:cNvSpPr/>
+          <p:nvPr/>
+        </p:nvSpPr>
+        <p:spPr>
+          <a:xfrm>
+            <a:off x="9692640" y="-1463040"/>
+            <a:ext cx="4206240" cy="4206240"/>
+          </a:xfrm>
+          <a:prstGeom prst="ellipse">
+            <a:avLst/>
+          </a:prstGeom>
+          <a:solidFill>
+            <a:srgbClr val="26306E"/>
+          </a:solidFill>
+          <a:ln/>
+        </p:spPr>
+      </p:sp>
+      <p:sp>
+        <p:nvSpPr>
+          <p:cNvPr id="3" name="Shape 1"/>
+          <p:cNvSpPr/>
+          <p:nvPr/>
+        </p:nvSpPr>
+        <p:spPr>
+          <a:xfrm>
+            <a:off x="-1280160" y="5120640"/>
+            <a:ext cx="3291840" cy="3291840"/>
+          </a:xfrm>
+          <a:prstGeom prst="ellipse">
+            <a:avLst/>
+          </a:prstGeom>
+          <a:solidFill>
+            <a:srgbClr val="26306E"/>
+          </a:solidFill>
+          <a:ln/>
+        </p:spPr>
+      </p:sp>
+      <p:sp>
+        <p:nvSpPr>
+          <p:cNvPr id="4" name="Shape 2"/>
+          <p:cNvSpPr/>
+          <p:nvPr/>
+        </p:nvSpPr>
+        <p:spPr>
+          <a:xfrm>
+            <a:off x="5693512" y="2331720"/>
+            <a:ext cx="804672" cy="804672"/>
+          </a:xfrm>
+          <a:prstGeom prst="ellipse">
+            <a:avLst/>
+          </a:prstGeom>
+          <a:solidFill>
+            <a:srgbClr val="F2994A"/>
+          </a:solidFill>
+          <a:ln/>
+        </p:spPr>
+      </p:sp>
+      <p:pic>
+        <p:nvPicPr>
+          <p:cNvPr id="5" name="Image 0" descr="preencoded.png">    </p:cNvPr>
+          <p:cNvPicPr>
+            <a:picLocks noChangeAspect="1"/>
+          </p:cNvPicPr>
+          <p:nvPr/>
+        </p:nvPicPr>
+        <p:blipFill>
+          <a:blip r:embed="rId1"/>
+          <a:stretch>
+            <a:fillRect/>
+          </a:stretch>
+        </p:blipFill>
+        <p:spPr>
+          <a:xfrm>
+            <a:off x="5894680" y="2532888"/>
+            <a:ext cx="402336" cy="402336"/>
+          </a:xfrm>
+          <a:prstGeom prst="rect">
+            <a:avLst/>
+          </a:prstGeom>
+        </p:spPr>
+      </p:pic>
+      <p:sp>
+        <p:nvSpPr>
+          <p:cNvPr id="6" name="Text 3"/>
+          <p:cNvSpPr txBox="1"/>
+          <p:nvPr/>
+        </p:nvSpPr>
+        <p:spPr>
+          <a:xfrm>
+            <a:off x="0" y="3337560"/>
+            <a:ext cx="12191695" cy="822960"/>
+          </a:xfrm>
+          <a:prstGeom prst="rect">
+            <a:avLst/>
+          </a:prstGeom>
+          <a:noFill/>
+          <a:ln/>
+        </p:spPr>
+        <p:txBody>
+          <a:bodyPr wrap="square" lIns="0" tIns="0" rIns="0" bIns="0" rtlCol="0" anchor="ctr"/>
+          <a:lstStyle/>
+          <a:p>
+            <a:pPr algn="ctr" indent="0" marL="0">
+              <a:buNone/>
+            </a:pPr>
+            <a:r>
+              <a:rPr lang="en-US" sz="3400" b="1" dirty="0">
+                <a:solidFill>
+                  <a:srgbClr val="FFFFFF"/>
+                </a:solidFill>
+                <a:latin typeface="Century Schoolbook" pitchFamily="34" charset="0"/>
+                <a:ea typeface="Century Schoolbook" pitchFamily="34" charset="-122"/>
+                <a:cs typeface="Century Schoolbook" pitchFamily="34" charset="-120"/>
+              </a:rPr>
+              <a:t>ありがとうございました</a:t>
+            </a:r>
+            <a:endParaRPr lang="en-US" sz="3400" dirty="0"/>
+          </a:p>
+        </p:txBody>
+      </p:sp>
+      <p:sp>
+        <p:nvSpPr>
+          <p:cNvPr id="7" name="Text 4"/>
+          <p:cNvSpPr txBox="1"/>
+          <p:nvPr/>
+        </p:nvSpPr>
+        <p:spPr>
+          <a:xfrm>
+            <a:off x="0" y="4160520"/>
+            <a:ext cx="12191695" cy="457200"/>
+          </a:xfrm>
+          <a:prstGeom prst="rect">
+            <a:avLst/>
+          </a:prstGeom>
+          <a:noFill/>
+          <a:ln/>
+        </p:spPr>
+        <p:txBody>
+          <a:bodyPr wrap="square" lIns="0" tIns="0" rIns="0" bIns="0" rtlCol="0" anchor="ctr"/>
+          <a:lstStyle/>
+          <a:p>
+            <a:pPr algn="ctr" indent="0" marL="0">
+              <a:buNone/>
+            </a:pPr>
+            <a:r>
+              <a:rPr lang="en-US" sz="1400" dirty="0">
+                <a:solidFill>
+                  <a:srgbClr val="CADCFC"/>
+                </a:solidFill>
+                <a:latin typeface="Calibri" pitchFamily="34" charset="0"/>
+                <a:ea typeface="Calibri" pitchFamily="34" charset="-122"/>
+                <a:cs typeface="Calibri" pitchFamily="34" charset="-120"/>
+              </a:rPr>
+              <a:t>熱中症見守りアプリ「ひといき」　都知事杯オープンデータハッカソン 2026</a:t>
+            </a:r>
+            <a:endParaRPr lang="en-US" sz="1400" dirty="0"/>
+          </a:p>
+        </p:txBody>
+      </p:sp>
+    </p:spTree>
+  </p:cSld>
+  <p:clrMapOvr>
+    <a:masterClrMapping/>
+  </p:clrMapOvr>
+</p:sld>
+</file>
+
 <file path=ppt/slides/slide2.xml><?xml version="1.0" encoding="utf-8"?>
 <p:sld xmlns:a="http://schemas.openxmlformats.org/drawingml/2006/main" xmlns:r="http://schemas.openxmlformats.org/officeDocument/2006/relationships" xmlns:p="http://schemas.openxmlformats.org/presentationml/2006/main">
   <p:cSld name="Slide 2">
@@ -3116,7 +3399,7 @@
                 <a:ea typeface="Calibri" pitchFamily="34" charset="-122"/>
                 <a:cs typeface="Calibri" pitchFamily="34" charset="-120"/>
               </a:rPr>
-              <a:t>開発規模：約10,000行（TypeScript／86ファイル、src配下）</a:t>
+              <a:t>開発規模：約10,000行</a:t>
             </a:r>
             <a:endParaRPr lang="en-US" sz="1200" dirty="0"/>
           </a:p>
@@ -4280,7 +4563,7 @@
                 <a:ea typeface="Calibri" pitchFamily="34" charset="-122"/>
                 <a:cs typeface="Calibri" pitchFamily="34" charset="-120"/>
               </a:rPr>
-              <a:t>チーム内で機能要件を整理し、Specification.mdを作成</a:t>
+              <a:t>チーム内で機能要件を整理し、要件一覧をMarkdownファイルにて作成</a:t>
             </a:r>
             <a:endParaRPr lang="en-US" sz="1250" dirty="0"/>
           </a:p>
@@ -4528,7 +4811,7 @@
                 <a:ea typeface="Calibri" pitchFamily="34" charset="-122"/>
                 <a:cs typeface="Calibri" pitchFamily="34" charset="-120"/>
               </a:rPr>
-              <a:t>Specification.mdと画面イメージをClaude Codeに渡し、各画面モックを作成</a:t>
+              <a:t>要件一覧と画面イメージをClaude Codeに渡し、各画面モックを作成</a:t>
             </a:r>
             <a:endParaRPr lang="en-US" sz="1250" dirty="0"/>
           </a:p>
@@ -4776,7 +5059,7 @@
                 <a:ea typeface="Calibri" pitchFamily="34" charset="-122"/>
                 <a:cs typeface="Calibri" pitchFamily="34" charset="-120"/>
               </a:rPr>
-              <a:t>Android Studioで表示確認、Specification.mdを修正しb〜cへ戻り再確認</a:t>
+              <a:t>Android Studioで表示確認、要件一覧を修正し、④へ戻り再確認</a:t>
             </a:r>
             <a:endParaRPr lang="en-US" sz="1250" dirty="0"/>
           </a:p>
@@ -5030,7 +5313,7 @@
                 <a:ea typeface="Calibri" pitchFamily="34" charset="-122"/>
                 <a:cs typeface="Calibri" pitchFamily="34" charset="-120"/>
               </a:rPr>
-              <a:t>Specification.md</a:t>
+              <a:t>要件一覧</a:t>
             </a:r>
             <a:endParaRPr lang="en-US" sz="1050" dirty="0"/>
           </a:p>
@@ -5050,7 +5333,7 @@
                 <a:ea typeface="Calibri" pitchFamily="34" charset="-122"/>
                 <a:cs typeface="Calibri" pitchFamily="34" charset="-120"/>
               </a:rPr>
-              <a:t>（★入力）</a:t>
+              <a:t>（Markdown）</a:t>
             </a:r>
             <a:endParaRPr lang="en-US" sz="1050" dirty="0"/>
           </a:p>
@@ -5111,7 +5394,7 @@
                 <a:ea typeface="Calibri" pitchFamily="34" charset="-122"/>
                 <a:cs typeface="Calibri" pitchFamily="34" charset="-120"/>
               </a:rPr>
-              <a:t>ChatGPT（AI）</a:t>
+              <a:t>ChatGPT（生成AI）</a:t>
             </a:r>
             <a:endParaRPr lang="en-US" sz="1050" dirty="0"/>
           </a:p>
@@ -5172,7 +5455,7 @@
                 <a:ea typeface="Calibri" pitchFamily="34" charset="-122"/>
                 <a:cs typeface="Calibri" pitchFamily="34" charset="-120"/>
               </a:rPr>
-              <a:t>Claude Code（AI）</a:t>
+              <a:t>Claude Code（生成AI）</a:t>
             </a:r>
             <a:endParaRPr lang="en-US" sz="1050" dirty="0"/>
           </a:p>
@@ -5241,7 +5524,7 @@
                 <a:ea typeface="Calibri" pitchFamily="34" charset="-122"/>
                 <a:cs typeface="Calibri" pitchFamily="34" charset="-120"/>
               </a:rPr>
-              <a:t>AppImage.png</a:t>
+              <a:t>画面イメージ</a:t>
             </a:r>
             <a:endParaRPr lang="en-US" sz="1000" dirty="0"/>
           </a:p>
@@ -5261,7 +5544,7 @@
                 <a:ea typeface="Calibri" pitchFamily="34" charset="-122"/>
                 <a:cs typeface="Calibri" pitchFamily="34" charset="-120"/>
               </a:rPr>
-              <a:t>（入出力）</a:t>
+              <a:t>（png）</a:t>
             </a:r>
             <a:endParaRPr lang="en-US" sz="1000" dirty="0"/>
           </a:p>
@@ -5316,10 +5599,13 @@
           <a:lstStyle/>
           <a:p>
             <a:pPr algn="ctr" indent="0" marL="0">
-              <a:buNone/>
-            </a:pPr>
-            <a:r>
-              <a:rPr lang="en-US" sz="1050" b="1" dirty="0">
+              <a:lnSpc>
+                <a:spcPct val="100000"/>
+              </a:lnSpc>
+              <a:buNone/>
+            </a:pPr>
+            <a:r>
+              <a:rPr lang="en-US" sz="1000" b="1" dirty="0">
                 <a:solidFill>
                   <a:srgbClr val="1E2761"/>
                 </a:solidFill>
@@ -5327,9 +5613,29 @@
                 <a:ea typeface="Calibri" pitchFamily="34" charset="-122"/>
                 <a:cs typeface="Calibri" pitchFamily="34" charset="-120"/>
               </a:rPr>
-              <a:t>Source（出力）</a:t>
-            </a:r>
-            <a:endParaRPr lang="en-US" sz="1050" dirty="0"/>
+              <a:t>コード</a:t>
+            </a:r>
+            <a:endParaRPr lang="en-US" sz="1000" dirty="0"/>
+          </a:p>
+          <a:p>
+            <a:pPr algn="ctr" indent="0" marL="0">
+              <a:lnSpc>
+                <a:spcPct val="100000"/>
+              </a:lnSpc>
+              <a:buNone/>
+            </a:pPr>
+            <a:r>
+              <a:rPr lang="en-US" sz="1000" b="1" dirty="0">
+                <a:solidFill>
+                  <a:srgbClr val="1E2761"/>
+                </a:solidFill>
+                <a:latin typeface="Calibri" pitchFamily="34" charset="0"/>
+                <a:ea typeface="Calibri" pitchFamily="34" charset="-122"/>
+                <a:cs typeface="Calibri" pitchFamily="34" charset="-120"/>
+              </a:rPr>
+              <a:t>（TypeScript/JSON）</a:t>
+            </a:r>
+            <a:endParaRPr lang="en-US" sz="1000" dirty="0"/>
           </a:p>
         </p:txBody>
       </p:sp>
@@ -5411,7 +5717,7 @@
                 <a:ea typeface="Calibri" pitchFamily="34" charset="-122"/>
                 <a:cs typeface="Calibri" pitchFamily="34" charset="-120"/>
               </a:rPr>
-              <a:t>（Emulator）</a:t>
+              <a:t>（エミュレータ）</a:t>
             </a:r>
             <a:endParaRPr lang="en-US" sz="1000" dirty="0"/>
           </a:p>
@@ -6049,7 +6355,7 @@
                 <a:ea typeface="Century Schoolbook" pitchFamily="34" charset="-122"/>
                 <a:cs typeface="Century Schoolbook" pitchFamily="34" charset="-120"/>
               </a:rPr>
-              <a:t>未経験の言語・FWから、2週間足らずでアプリ完成に到達</a:t>
+              <a:t>未経験の言語・FWから、2週間足らずでデモアプリを完成</a:t>
             </a:r>
             <a:endParaRPr lang="en-US" sz="2200" dirty="0"/>
           </a:p>
@@ -6465,11 +6771,11 @@
         <p:spPr>
           <a:xfrm>
             <a:off x="640080" y="1691640"/>
-            <a:ext cx="5257800" cy="2331720"/>
+            <a:ext cx="5257800" cy="2606040"/>
           </a:xfrm>
           <a:prstGeom prst="roundRect">
             <a:avLst>
-              <a:gd name="adj" fmla="val 4706"/>
+              <a:gd name="adj" fmla="val 4211"/>
             </a:avLst>
           </a:prstGeom>
           <a:solidFill>
@@ -6537,8 +6843,8 @@
         </p:nvSpPr>
         <p:spPr>
           <a:xfrm>
-            <a:off x="1645920" y="1993392"/>
-            <a:ext cx="3977640" cy="502920"/>
+            <a:off x="1645920" y="1947672"/>
+            <a:ext cx="3977640" cy="685800"/>
           </a:xfrm>
           <a:prstGeom prst="rect">
             <a:avLst/>
@@ -6551,6 +6857,9 @@
           <a:lstStyle/>
           <a:p>
             <a:pPr indent="0" marL="0">
+              <a:lnSpc>
+                <a:spcPct val="110000"/>
+              </a:lnSpc>
               <a:buNone/>
             </a:pPr>
             <a:r>
@@ -6562,61 +6871,61 @@
                 <a:ea typeface="Century Schoolbook" pitchFamily="34" charset="-122"/>
                 <a:cs typeface="Century Schoolbook" pitchFamily="34" charset="-120"/>
               </a:rPr>
-              <a:t>短期開発ゆえの精査不足</a:t>
+              <a:t>"動く"は確認できても、</a:t>
             </a:r>
             <a:endParaRPr lang="en-US" sz="1600" dirty="0"/>
           </a:p>
-        </p:txBody>
-      </p:sp>
-      <p:sp>
-        <p:nvSpPr>
-          <p:cNvPr id="8" name="Text 5"/>
-          <p:cNvSpPr txBox="1"/>
-          <p:nvPr/>
-        </p:nvSpPr>
-        <p:spPr>
-          <a:xfrm>
-            <a:off x="960120" y="2697480"/>
-            <a:ext cx="4617720" cy="1188720"/>
-          </a:xfrm>
-          <a:prstGeom prst="rect">
-            <a:avLst/>
-          </a:prstGeom>
-          <a:noFill/>
-          <a:ln/>
-        </p:spPr>
-        <p:txBody>
-          <a:bodyPr wrap="square" lIns="0" tIns="0" rIns="0" bIns="0" rtlCol="0" anchor="ctr"/>
-          <a:lstStyle/>
           <a:p>
             <a:pPr indent="0" marL="0">
               <a:lnSpc>
-                <a:spcPct val="135000"/>
+                <a:spcPct val="110000"/>
               </a:lnSpc>
               <a:buNone/>
             </a:pPr>
             <a:r>
-              <a:rPr lang="en-US" sz="1300" dirty="0">
-                <a:solidFill>
-                  <a:srgbClr val="26314F"/>
-                </a:solidFill>
-                <a:latin typeface="Calibri" pitchFamily="34" charset="0"/>
-                <a:ea typeface="Calibri" pitchFamily="34" charset="-122"/>
-                <a:cs typeface="Calibri" pitchFamily="34" charset="-120"/>
-              </a:rPr>
-              <a:t>アメダス情報取得の際、スクレイピングのような実装に着手しかけていた。</a:t>
-            </a:r>
-            <a:endParaRPr lang="en-US" sz="1300" dirty="0"/>
-          </a:p>
+              <a:rPr lang="en-US" sz="1600" b="1" dirty="0">
+                <a:solidFill>
+                  <a:srgbClr val="1E2761"/>
+                </a:solidFill>
+                <a:latin typeface="Century Schoolbook" pitchFamily="34" charset="0"/>
+                <a:ea typeface="Century Schoolbook" pitchFamily="34" charset="-122"/>
+                <a:cs typeface="Century Schoolbook" pitchFamily="34" charset="-120"/>
+              </a:rPr>
+              <a:t>"わかる"には至らなかった</a:t>
+            </a:r>
+            <a:endParaRPr lang="en-US" sz="1600" dirty="0"/>
+          </a:p>
+        </p:txBody>
+      </p:sp>
+      <p:sp>
+        <p:nvSpPr>
+          <p:cNvPr id="8" name="Text 5"/>
+          <p:cNvSpPr txBox="1"/>
+          <p:nvPr/>
+        </p:nvSpPr>
+        <p:spPr>
+          <a:xfrm>
+            <a:off x="960120" y="2788920"/>
+            <a:ext cx="4617720" cy="1325880"/>
+          </a:xfrm>
+          <a:prstGeom prst="rect">
+            <a:avLst/>
+          </a:prstGeom>
+          <a:noFill/>
+          <a:ln/>
+        </p:spPr>
+        <p:txBody>
+          <a:bodyPr wrap="square" lIns="0" tIns="0" rIns="0" bIns="0" rtlCol="0" anchor="ctr"/>
+          <a:lstStyle/>
           <a:p>
             <a:pPr indent="0" marL="0">
               <a:lnSpc>
-                <a:spcPct val="135000"/>
+                <a:spcPct val="130000"/>
               </a:lnSpc>
               <a:buNone/>
             </a:pPr>
             <a:r>
-              <a:rPr lang="en-US" sz="1300" dirty="0">
+              <a:rPr lang="en-US" sz="1200" dirty="0">
                 <a:solidFill>
                   <a:srgbClr val="26314F"/>
                 </a:solidFill>
@@ -6624,9 +6933,29 @@
                 <a:ea typeface="Calibri" pitchFamily="34" charset="-122"/>
                 <a:cs typeface="Calibri" pitchFamily="34" charset="-120"/>
               </a:rPr>
-              <a:t>→ 現在は静的スナップショットデータを利用する方式に変更。</a:t>
-            </a:r>
-            <a:endParaRPr lang="en-US" sz="1300" dirty="0"/>
+              <a:t>短期間での開発／要件から一足飛びの実装／TypeScript未経験、という3つの要因が重なり、実装内容をチームで精査する時間を確保できなかった。</a:t>
+            </a:r>
+            <a:endParaRPr lang="en-US" sz="1200" dirty="0"/>
+          </a:p>
+          <a:p>
+            <a:pPr indent="0" marL="0">
+              <a:lnSpc>
+                <a:spcPct val="130000"/>
+              </a:lnSpc>
+              <a:buNone/>
+            </a:pPr>
+            <a:r>
+              <a:rPr lang="en-US" sz="1200" dirty="0">
+                <a:solidFill>
+                  <a:srgbClr val="26314F"/>
+                </a:solidFill>
+                <a:latin typeface="Calibri" pitchFamily="34" charset="0"/>
+                <a:ea typeface="Calibri" pitchFamily="34" charset="-122"/>
+                <a:cs typeface="Calibri" pitchFamily="34" charset="-120"/>
+              </a:rPr>
+              <a:t>前述の「誰でも即戦力になれる」は裏を返せば、理解が伴わないまま進めても動くものができてしまう、ということでもある。</a:t>
+            </a:r>
+            <a:endParaRPr lang="en-US" sz="1200" dirty="0"/>
           </a:p>
         </p:txBody>
       </p:sp>
@@ -6639,11 +6968,11 @@
         <p:spPr>
           <a:xfrm>
             <a:off x="6263640" y="1691640"/>
-            <a:ext cx="5257800" cy="2331720"/>
+            <a:ext cx="5257800" cy="2606040"/>
           </a:xfrm>
           <a:prstGeom prst="roundRect">
             <a:avLst>
-              <a:gd name="adj" fmla="val 4706"/>
+              <a:gd name="adj" fmla="val 4211"/>
             </a:avLst>
           </a:prstGeom>
           <a:solidFill>
@@ -6711,8 +7040,8 @@
         </p:nvSpPr>
         <p:spPr>
           <a:xfrm>
-            <a:off x="7269480" y="1993392"/>
-            <a:ext cx="3977640" cy="502920"/>
+            <a:off x="7269480" y="1947672"/>
+            <a:ext cx="3977640" cy="685800"/>
           </a:xfrm>
           <a:prstGeom prst="rect">
             <a:avLst/>
@@ -6725,6 +7054,9 @@
           <a:lstStyle/>
           <a:p>
             <a:pPr indent="0" marL="0">
+              <a:lnSpc>
+                <a:spcPct val="110000"/>
+              </a:lnSpc>
               <a:buNone/>
             </a:pPr>
             <a:r>
@@ -6736,61 +7068,61 @@
                 <a:ea typeface="Century Schoolbook" pitchFamily="34" charset="-122"/>
                 <a:cs typeface="Century Schoolbook" pitchFamily="34" charset="-120"/>
               </a:rPr>
-              <a:t>生成AIのトークンが溶けた</a:t>
+              <a:t>気づけばトークンを</a:t>
             </a:r>
             <a:endParaRPr lang="en-US" sz="1600" dirty="0"/>
           </a:p>
-        </p:txBody>
-      </p:sp>
-      <p:sp>
-        <p:nvSpPr>
-          <p:cNvPr id="13" name="Text 9"/>
-          <p:cNvSpPr txBox="1"/>
-          <p:nvPr/>
-        </p:nvSpPr>
-        <p:spPr>
-          <a:xfrm>
-            <a:off x="6583680" y="2697480"/>
-            <a:ext cx="4617720" cy="1188720"/>
-          </a:xfrm>
-          <a:prstGeom prst="rect">
-            <a:avLst/>
-          </a:prstGeom>
-          <a:noFill/>
-          <a:ln/>
-        </p:spPr>
-        <p:txBody>
-          <a:bodyPr wrap="square" lIns="0" tIns="0" rIns="0" bIns="0" rtlCol="0" anchor="ctr"/>
-          <a:lstStyle/>
           <a:p>
             <a:pPr indent="0" marL="0">
               <a:lnSpc>
-                <a:spcPct val="135000"/>
+                <a:spcPct val="110000"/>
               </a:lnSpc>
               <a:buNone/>
             </a:pPr>
             <a:r>
-              <a:rPr lang="en-US" sz="1300" dirty="0">
-                <a:solidFill>
-                  <a:srgbClr val="26314F"/>
-                </a:solidFill>
-                <a:latin typeface="Calibri" pitchFamily="34" charset="0"/>
-                <a:ea typeface="Calibri" pitchFamily="34" charset="-122"/>
-                <a:cs typeface="Calibri" pitchFamily="34" charset="-120"/>
-              </a:rPr>
-              <a:t>機能追加そのものは大きく消費しないが、コンテキストが肥大化する作業</a:t>
-            </a:r>
-            <a:endParaRPr lang="en-US" sz="1300" dirty="0"/>
-          </a:p>
+              <a:rPr lang="en-US" sz="1600" b="1" dirty="0">
+                <a:solidFill>
+                  <a:srgbClr val="1E2761"/>
+                </a:solidFill>
+                <a:latin typeface="Century Schoolbook" pitchFamily="34" charset="0"/>
+                <a:ea typeface="Century Schoolbook" pitchFamily="34" charset="-122"/>
+                <a:cs typeface="Century Schoolbook" pitchFamily="34" charset="-120"/>
+              </a:rPr>
+              <a:t>消費しきっていた</a:t>
+            </a:r>
+            <a:endParaRPr lang="en-US" sz="1600" dirty="0"/>
+          </a:p>
+        </p:txBody>
+      </p:sp>
+      <p:sp>
+        <p:nvSpPr>
+          <p:cNvPr id="13" name="Text 9"/>
+          <p:cNvSpPr txBox="1"/>
+          <p:nvPr/>
+        </p:nvSpPr>
+        <p:spPr>
+          <a:xfrm>
+            <a:off x="6583680" y="2788920"/>
+            <a:ext cx="4617720" cy="1325880"/>
+          </a:xfrm>
+          <a:prstGeom prst="rect">
+            <a:avLst/>
+          </a:prstGeom>
+          <a:noFill/>
+          <a:ln/>
+        </p:spPr>
+        <p:txBody>
+          <a:bodyPr wrap="square" lIns="0" tIns="0" rIns="0" bIns="0" rtlCol="0" anchor="ctr"/>
+          <a:lstStyle/>
           <a:p>
             <a:pPr indent="0" marL="0">
               <a:lnSpc>
-                <a:spcPct val="135000"/>
+                <a:spcPct val="130000"/>
               </a:lnSpc>
               <a:buNone/>
             </a:pPr>
             <a:r>
-              <a:rPr lang="en-US" sz="1300" dirty="0">
+              <a:rPr lang="en-US" sz="1200" dirty="0">
                 <a:solidFill>
                   <a:srgbClr val="26314F"/>
                 </a:solidFill>
@@ -6798,9 +7130,29 @@
                 <a:ea typeface="Calibri" pitchFamily="34" charset="-122"/>
                 <a:cs typeface="Calibri" pitchFamily="34" charset="-120"/>
               </a:rPr>
-              <a:t>（大きなデータ／ログをそのまま読込、長いチャットの継続）で急増する。</a:t>
-            </a:r>
-            <a:endParaRPr lang="en-US" sz="1300" dirty="0"/>
+              <a:t>機能追加そのものはさほど消費しないが、コンテキストが肥大化する作業（大きなデータ／ログをそのまま読み込む、長時間チャットを続ける等）で急増する。</a:t>
+            </a:r>
+            <a:endParaRPr lang="en-US" sz="1200" dirty="0"/>
+          </a:p>
+          <a:p>
+            <a:pPr indent="0" marL="0">
+              <a:lnSpc>
+                <a:spcPct val="130000"/>
+              </a:lnSpc>
+              <a:buNone/>
+            </a:pPr>
+            <a:r>
+              <a:rPr lang="en-US" sz="1200" dirty="0">
+                <a:solidFill>
+                  <a:srgbClr val="26314F"/>
+                </a:solidFill>
+                <a:latin typeface="Calibri" pitchFamily="34" charset="0"/>
+                <a:ea typeface="Calibri" pitchFamily="34" charset="-122"/>
+                <a:cs typeface="Calibri" pitchFamily="34" charset="-120"/>
+              </a:rPr>
+              <a:t>→ 要点を絞った指示や、不要な情報を読み込ませないプロンプト設計により、消費は十分に抑制できる。</a:t>
+            </a:r>
+            <a:endParaRPr lang="en-US" sz="1200" dirty="0"/>
           </a:p>
         </p:txBody>
       </p:sp>
@@ -6812,12 +7164,12 @@
         </p:nvSpPr>
         <p:spPr>
           <a:xfrm>
-            <a:off x="640080" y="4251960"/>
-            <a:ext cx="10881360" cy="1737360"/>
+            <a:off x="640080" y="4389120"/>
+            <a:ext cx="10881360" cy="1508760"/>
           </a:xfrm>
           <a:prstGeom prst="roundRect">
             <a:avLst>
-              <a:gd name="adj" fmla="val 6316"/>
+              <a:gd name="adj" fmla="val 7273"/>
             </a:avLst>
           </a:prstGeom>
           <a:solidFill>
@@ -6834,7 +7186,7 @@
         </p:nvSpPr>
         <p:spPr>
           <a:xfrm>
-            <a:off x="914400" y="4434840"/>
+            <a:off x="914400" y="4553712"/>
             <a:ext cx="2743200" cy="320040"/>
           </a:xfrm>
           <a:prstGeom prst="rect">
@@ -6873,8 +7225,8 @@
         </p:nvSpPr>
         <p:spPr>
           <a:xfrm>
-            <a:off x="914400" y="4800600"/>
-            <a:ext cx="10332720" cy="1051560"/>
+            <a:off x="914400" y="4864608"/>
+            <a:ext cx="10332720" cy="914400"/>
           </a:xfrm>
           <a:prstGeom prst="rect">
             <a:avLst/>
@@ -6888,7 +7240,7 @@
           <a:p>
             <a:pPr indent="0" marL="0">
               <a:lnSpc>
-                <a:spcPct val="150000"/>
+                <a:spcPct val="145000"/>
               </a:lnSpc>
               <a:buNone/>
             </a:pPr>
@@ -6905,7 +7257,7 @@
             </a:r>
             <a:pPr indent="0" marL="0">
               <a:lnSpc>
-                <a:spcPct val="150000"/>
+                <a:spcPct val="145000"/>
               </a:lnSpc>
               <a:buNone/>
             </a:pPr>
@@ -6925,7 +7277,7 @@
           <a:p>
             <a:pPr indent="0" marL="0">
               <a:lnSpc>
-                <a:spcPct val="150000"/>
+                <a:spcPct val="145000"/>
               </a:lnSpc>
               <a:buNone/>
             </a:pPr>
@@ -6942,7 +7294,7 @@
             </a:r>
             <a:pPr indent="0" marL="0">
               <a:lnSpc>
-                <a:spcPct val="150000"/>
+                <a:spcPct val="145000"/>
               </a:lnSpc>
               <a:buNone/>
             </a:pPr>
@@ -7310,7 +7662,7 @@
                 <a:ea typeface="Calibri" pitchFamily="34" charset="-122"/>
                 <a:cs typeface="Calibri" pitchFamily="34" charset="-120"/>
               </a:rPr>
-              <a:t>SIS事業本部の配属メンバーを2〜3チーム（各3〜5名）に分けて開発</a:t>
+              <a:t>SIS事業本部の配属メンバーを少人数のチーム（各3〜5名）に分けて開発</a:t>
             </a:r>
             <a:endParaRPr lang="en-US" sz="1300" dirty="0"/>
           </a:p>
@@ -8222,7 +8574,7 @@
                 <a:ea typeface="Calibri" pitchFamily="34" charset="-122"/>
                 <a:cs typeface="Calibri" pitchFamily="34" charset="-120"/>
               </a:rPr>
-              <a:t>AI駆動の開発を体感できたことは、大変貴重な経験だった</a:t>
+              <a:t>Claude Codeをはじめ、さまざまAIを触れることで、そのパワーと可能性を感じることができた</a:t>
             </a:r>
             <a:endParaRPr lang="en-US" sz="1450" dirty="0"/>
           </a:p>
@@ -8283,7 +8635,7 @@
                 <a:ea typeface="Calibri" pitchFamily="34" charset="-122"/>
                 <a:cs typeface="Calibri" pitchFamily="34" charset="-120"/>
               </a:rPr>
-              <a:t>反面、AIがほぼやってくれるので「正直、僕はいらんなぁ…」と思う場面もしばしば</a:t>
+              <a:t>反面、AIがほぼやってくれるので、自己肯定感が下がることもしばしばあった</a:t>
             </a:r>
             <a:endParaRPr lang="en-US" sz="1450" dirty="0"/>
           </a:p>
@@ -8419,45 +8771,6 @@
         </p:nvSpPr>
         <p:spPr>
           <a:xfrm>
-            <a:off x="822960" y="5989320"/>
-            <a:ext cx="10515600" cy="457200"/>
-          </a:xfrm>
-          <a:prstGeom prst="rect">
-            <a:avLst/>
-          </a:prstGeom>
-          <a:noFill/>
-          <a:ln/>
-        </p:spPr>
-        <p:txBody>
-          <a:bodyPr wrap="square" lIns="0" tIns="0" rIns="0" bIns="0" rtlCol="0" anchor="ctr"/>
-          <a:lstStyle/>
-          <a:p>
-            <a:pPr indent="0" marL="0">
-              <a:buNone/>
-            </a:pPr>
-            <a:r>
-              <a:rPr lang="en-US" sz="1150" i="1" dirty="0">
-                <a:solidFill>
-                  <a:srgbClr val="CADCFC"/>
-                </a:solidFill>
-                <a:latin typeface="Calibri" pitchFamily="34" charset="0"/>
-                <a:ea typeface="Calibri" pitchFamily="34" charset="-122"/>
-                <a:cs typeface="Calibri" pitchFamily="34" charset="-120"/>
-              </a:rPr>
-              <a:t>例）実装してほしい動作をちゃんと実装してくれているか／良かれと思って余計な作業をさせていないか</a:t>
-            </a:r>
-            <a:endParaRPr lang="en-US" sz="1150" dirty="0"/>
-          </a:p>
-        </p:txBody>
-      </p:sp>
-      <p:sp>
-        <p:nvSpPr>
-          <p:cNvPr id="16" name="Text 13"/>
-          <p:cNvSpPr txBox="1"/>
-          <p:nvPr/>
-        </p:nvSpPr>
-        <p:spPr>
-          <a:xfrm>
             <a:off x="457200" y="6473952"/>
             <a:ext cx="7315200" cy="274320"/>
           </a:xfrm>
@@ -8491,7 +8804,7 @@
       </p:sp>
       <p:sp>
         <p:nvSpPr>
-          <p:cNvPr id="17" name="Text 14"/>
+          <p:cNvPr id="16" name="Text 13"/>
           <p:cNvSpPr txBox="1"/>
           <p:nvPr/>
         </p:nvSpPr>
@@ -8744,7 +9057,7 @@
                 <a:ea typeface="Century Schoolbook" pitchFamily="34" charset="-122"/>
                 <a:cs typeface="Century Schoolbook" pitchFamily="34" charset="-120"/>
               </a:rPr>
-              <a:t>ハッカソン提出プレゼン</a:t>
+              <a:t>ハッカソンに提出したプレゼンテーションの実演</a:t>
             </a:r>
             <a:endParaRPr lang="en-US" sz="1800" dirty="0"/>
           </a:p>

--- a/docs/presentations/9-11_部会発表_ひといきアプリ開発レポート.pptx
+++ b/docs/presentations/9-11_部会発表_ひといきアプリ開発レポート.pptx
@@ -3213,7 +3213,7 @@
         <p:spPr>
           <a:xfrm>
             <a:off x="6537960" y="3794760"/>
-            <a:ext cx="4937760" cy="822960"/>
+            <a:ext cx="4937760" cy="1051560"/>
           </a:xfrm>
           <a:prstGeom prst="rect">
             <a:avLst/>
@@ -3227,12 +3227,12 @@
           <a:p>
             <a:pPr indent="0" marL="0">
               <a:lnSpc>
-                <a:spcPct val="130000"/>
+                <a:spcPct val="125000"/>
               </a:lnSpc>
               <a:buNone/>
             </a:pPr>
             <a:r>
-              <a:rPr lang="en-US" sz="1250" dirty="0">
+              <a:rPr lang="en-US" sz="1150" dirty="0">
                 <a:solidFill>
                   <a:srgbClr val="26314F"/>
                 </a:solidFill>
@@ -3240,19 +3240,19 @@
                 <a:ea typeface="Calibri" pitchFamily="34" charset="-122"/>
                 <a:cs typeface="Calibri" pitchFamily="34" charset="-120"/>
               </a:rPr>
-              <a:t>危険度は水色→緑→黄色→橙→赤→紫の6段階で表示し、しきい値を超えると</a:t>
-            </a:r>
-            <a:endParaRPr lang="en-US" sz="1250" dirty="0"/>
+              <a:t>危険度は水色→緑→黄色→橙→赤→紫の6段階で表示し、しきい値を超えると他のメンバーにも通知が届く。</a:t>
+            </a:r>
+            <a:endParaRPr lang="en-US" sz="1150" dirty="0"/>
           </a:p>
           <a:p>
             <a:pPr indent="0" marL="0">
               <a:lnSpc>
-                <a:spcPct val="130000"/>
+                <a:spcPct val="125000"/>
               </a:lnSpc>
               <a:buNone/>
             </a:pPr>
             <a:r>
-              <a:rPr lang="en-US" sz="1250" dirty="0">
+              <a:rPr lang="en-US" sz="1150" dirty="0">
                 <a:solidFill>
                   <a:srgbClr val="26314F"/>
                 </a:solidFill>
@@ -3260,9 +3260,9 @@
                 <a:ea typeface="Calibri" pitchFamily="34" charset="-122"/>
                 <a:cs typeface="Calibri" pitchFamily="34" charset="-120"/>
               </a:rPr>
-              <a:t>他のメンバーにも通知が届く。</a:t>
-            </a:r>
-            <a:endParaRPr lang="en-US" sz="1250" dirty="0"/>
+              <a:t>地図のヒートマップには、環境省が公開するWBGT（暑さ指数）のリアルタイムデータをIDW補間して表示。</a:t>
+            </a:r>
+            <a:endParaRPr lang="en-US" sz="1150" dirty="0"/>
           </a:p>
         </p:txBody>
       </p:sp>
@@ -3274,12 +3274,12 @@
         </p:nvSpPr>
         <p:spPr>
           <a:xfrm>
-            <a:off x="6537960" y="4709160"/>
-            <a:ext cx="5029200" cy="1463040"/>
+            <a:off x="6537960" y="4892040"/>
+            <a:ext cx="5029200" cy="1280160"/>
           </a:xfrm>
           <a:prstGeom prst="roundRect">
             <a:avLst>
-              <a:gd name="adj" fmla="val 6250"/>
+              <a:gd name="adj" fmla="val 7143"/>
             </a:avLst>
           </a:prstGeom>
           <a:solidFill>
@@ -3296,7 +3296,7 @@
         </p:nvSpPr>
         <p:spPr>
           <a:xfrm>
-            <a:off x="6812280" y="4846320"/>
+            <a:off x="6812280" y="5029200"/>
             <a:ext cx="4572000" cy="365760"/>
           </a:xfrm>
           <a:prstGeom prst="rect">
@@ -3335,7 +3335,7 @@
         </p:nvSpPr>
         <p:spPr>
           <a:xfrm>
-            <a:off x="6812280" y="5193792"/>
+            <a:off x="6812280" y="5376672"/>
             <a:ext cx="4572000" cy="320040"/>
           </a:xfrm>
           <a:prstGeom prst="rect">
@@ -3374,8 +3374,8 @@
         </p:nvSpPr>
         <p:spPr>
           <a:xfrm>
-            <a:off x="6812280" y="5486400"/>
-            <a:ext cx="4572000" cy="548640"/>
+            <a:off x="6812280" y="5669280"/>
+            <a:ext cx="4572000" cy="457200"/>
           </a:xfrm>
           <a:prstGeom prst="rect">
             <a:avLst/>
